--- a/assets/pptx/catalog-585.pptx
+++ b/assets/pptx/catalog-585.pptx
@@ -3250,7 +3250,7 @@
                 <a:ea typeface="Ebrima"/>
                 <a:cs typeface="Ebrima"/>
               </a:rPr>
-              <a:t>የሚመካ በእግዚአብሔር ይመካ(×2)</a:t>
+              <a:t>የሚመካ በእግዚአብሔር ይመካ×2</a:t>
             </a:r>
           </a:p>
           <a:p>
@@ -3353,7 +3353,7 @@
                 <a:ea typeface="Ebrima"/>
                 <a:cs typeface="Ebrima"/>
               </a:rPr>
-              <a:t>የሚደገፍ በእግዚአብሔር ይደገፍ(×2)</a:t>
+              <a:t>የሚደገፍ በእግዚአብሔር ይደገፍ×2</a:t>
             </a:r>
           </a:p>
           <a:p>
@@ -3371,7 +3371,7 @@
                 <a:ea typeface="Ebrima"/>
                 <a:cs typeface="Ebrima"/>
               </a:rPr>
-              <a:t>እኔስ ባንተ እደገፋለሁ(×2)</a:t>
+              <a:t>እኔስ ባንተ እደገፋለሁ×2</a:t>
             </a:r>
           </a:p>
         </p:txBody>
@@ -3559,7 +3559,7 @@
                 <a:ea typeface="Ebrima"/>
                 <a:cs typeface="Ebrima"/>
               </a:rPr>
-              <a:t>የሚመካ በእግዚአብሔር ይመካ(×2)</a:t>
+              <a:t>የሚመካ በእግዚአብሔር ይመካ×2</a:t>
             </a:r>
           </a:p>
           <a:p>
@@ -3662,7 +3662,7 @@
                 <a:ea typeface="Ebrima"/>
                 <a:cs typeface="Ebrima"/>
               </a:rPr>
-              <a:t>የሚደገፍ በእግዚአብሔር ይደገፍ(×2)</a:t>
+              <a:t>የሚደገፍ በእግዚአብሔር ይደገፍ×2</a:t>
             </a:r>
           </a:p>
           <a:p>
@@ -3680,7 +3680,7 @@
                 <a:ea typeface="Ebrima"/>
                 <a:cs typeface="Ebrima"/>
               </a:rPr>
-              <a:t>እኔስ ባንተ እደገፋለሁ(×2)</a:t>
+              <a:t>እኔስ ባንተ እደገፋለሁ×2</a:t>
             </a:r>
           </a:p>
         </p:txBody>
@@ -3868,7 +3868,7 @@
                 <a:ea typeface="Ebrima"/>
                 <a:cs typeface="Ebrima"/>
               </a:rPr>
-              <a:t>የሚመካ በእግዚአብሔር ይመካ(×2)</a:t>
+              <a:t>የሚመካ በእግዚአብሔር ይመካ×2</a:t>
             </a:r>
           </a:p>
           <a:p>
@@ -3971,7 +3971,7 @@
                 <a:ea typeface="Ebrima"/>
                 <a:cs typeface="Ebrima"/>
               </a:rPr>
-              <a:t>የሚደገፍ በእግዚአብሔር ይደገፍ(×2)</a:t>
+              <a:t>የሚደገፍ በእግዚአብሔር ይደገፍ×2</a:t>
             </a:r>
           </a:p>
           <a:p>
@@ -3989,7 +3989,7 @@
                 <a:ea typeface="Ebrima"/>
                 <a:cs typeface="Ebrima"/>
               </a:rPr>
-              <a:t>እኔስ ባንተ እደገፋለሁ(×2)</a:t>
+              <a:t>እኔስ ባንተ እደገፋለሁ×2</a:t>
             </a:r>
           </a:p>
         </p:txBody>
